--- a/presentaciones/07 Registry y Distribución de Imágenes.pptx
+++ b/presentaciones/07 Registry y Distribución de Imágenes.pptx
@@ -10,8 +10,6 @@
     <p:sldId id="261" r:id="rId4"/>
     <p:sldId id="299" r:id="rId5"/>
     <p:sldId id="263" r:id="rId6"/>
-    <p:sldId id="291" r:id="rId7"/>
-    <p:sldId id="296" r:id="rId8"/>
   </p:sldIdLst>
   <p:sldSz cx="12192000" cy="6858000"/>
   <p:notesSz cx="6858000" cy="9144000"/>
@@ -310,7 +308,7 @@
             <a:fld id="{B61BEF0D-F0BB-DE4B-95CE-6DB70DBA9567}" type="datetimeFigureOut">
               <a:rPr lang="en-US" dirty="0"/>
               <a:pPr/>
-              <a:t>8/23/2026</a:t>
+              <a:t>8/25/2026</a:t>
             </a:fld>
             <a:endParaRPr lang="en-US" dirty="0"/>
           </a:p>
@@ -743,7 +741,7 @@
             <a:fld id="{B61BEF0D-F0BB-DE4B-95CE-6DB70DBA9567}" type="datetimeFigureOut">
               <a:rPr lang="en-US" dirty="0"/>
               <a:pPr/>
-              <a:t>8/23/2026</a:t>
+              <a:t>8/25/2026</a:t>
             </a:fld>
             <a:endParaRPr lang="en-US" dirty="0"/>
           </a:p>
@@ -990,7 +988,7 @@
             <a:fld id="{B61BEF0D-F0BB-DE4B-95CE-6DB70DBA9567}" type="datetimeFigureOut">
               <a:rPr lang="en-US" dirty="0"/>
               <a:pPr/>
-              <a:t>8/23/2026</a:t>
+              <a:t>8/25/2026</a:t>
             </a:fld>
             <a:endParaRPr lang="en-US" dirty="0"/>
           </a:p>
@@ -1295,7 +1293,7 @@
             <a:fld id="{B61BEF0D-F0BB-DE4B-95CE-6DB70DBA9567}" type="datetimeFigureOut">
               <a:rPr lang="en-US" dirty="0"/>
               <a:pPr/>
-              <a:t>8/23/2026</a:t>
+              <a:t>8/25/2026</a:t>
             </a:fld>
             <a:endParaRPr lang="en-US" dirty="0"/>
           </a:p>
@@ -1610,7 +1608,7 @@
             <a:fld id="{B61BEF0D-F0BB-DE4B-95CE-6DB70DBA9567}" type="datetimeFigureOut">
               <a:rPr lang="en-US" dirty="0"/>
               <a:pPr/>
-              <a:t>8/23/2026</a:t>
+              <a:t>8/25/2026</a:t>
             </a:fld>
             <a:endParaRPr lang="en-US" dirty="0"/>
           </a:p>
@@ -1909,7 +1907,7 @@
             <a:fld id="{B61BEF0D-F0BB-DE4B-95CE-6DB70DBA9567}" type="datetimeFigureOut">
               <a:rPr lang="en-US" dirty="0"/>
               <a:pPr/>
-              <a:t>8/23/2026</a:t>
+              <a:t>8/25/2026</a:t>
             </a:fld>
             <a:endParaRPr lang="en-US" dirty="0"/>
           </a:p>
@@ -2273,7 +2271,7 @@
             <a:fld id="{B61BEF0D-F0BB-DE4B-95CE-6DB70DBA9567}" type="datetimeFigureOut">
               <a:rPr lang="en-US" dirty="0"/>
               <a:pPr/>
-              <a:t>8/23/2026</a:t>
+              <a:t>8/25/2026</a:t>
             </a:fld>
             <a:endParaRPr lang="en-US" dirty="0"/>
           </a:p>
@@ -2444,7 +2442,7 @@
             <a:fld id="{B61BEF0D-F0BB-DE4B-95CE-6DB70DBA9567}" type="datetimeFigureOut">
               <a:rPr lang="en-US" dirty="0"/>
               <a:pPr/>
-              <a:t>8/23/2026</a:t>
+              <a:t>8/25/2026</a:t>
             </a:fld>
             <a:endParaRPr lang="en-US" dirty="0"/>
           </a:p>
@@ -2621,7 +2619,7 @@
             <a:fld id="{B61BEF0D-F0BB-DE4B-95CE-6DB70DBA9567}" type="datetimeFigureOut">
               <a:rPr lang="en-US" dirty="0"/>
               <a:pPr/>
-              <a:t>8/23/2026</a:t>
+              <a:t>8/25/2026</a:t>
             </a:fld>
             <a:endParaRPr lang="en-US" dirty="0"/>
           </a:p>
@@ -2788,7 +2786,7 @@
             <a:fld id="{B61BEF0D-F0BB-DE4B-95CE-6DB70DBA9567}" type="datetimeFigureOut">
               <a:rPr lang="en-US" dirty="0"/>
               <a:pPr/>
-              <a:t>8/23/2026</a:t>
+              <a:t>8/25/2026</a:t>
             </a:fld>
             <a:endParaRPr lang="en-US" dirty="0"/>
           </a:p>
@@ -3035,7 +3033,7 @@
             <a:fld id="{B61BEF0D-F0BB-DE4B-95CE-6DB70DBA9567}" type="datetimeFigureOut">
               <a:rPr lang="en-US" dirty="0"/>
               <a:pPr/>
-              <a:t>8/23/2026</a:t>
+              <a:t>8/25/2026</a:t>
             </a:fld>
             <a:endParaRPr lang="en-US" dirty="0"/>
           </a:p>
@@ -3268,7 +3266,7 @@
             <a:fld id="{B61BEF0D-F0BB-DE4B-95CE-6DB70DBA9567}" type="datetimeFigureOut">
               <a:rPr lang="en-US" dirty="0"/>
               <a:pPr/>
-              <a:t>8/23/2026</a:t>
+              <a:t>8/25/2026</a:t>
             </a:fld>
             <a:endParaRPr lang="en-US" dirty="0"/>
           </a:p>
@@ -3647,7 +3645,7 @@
             <a:fld id="{B61BEF0D-F0BB-DE4B-95CE-6DB70DBA9567}" type="datetimeFigureOut">
               <a:rPr lang="en-US" dirty="0"/>
               <a:pPr/>
-              <a:t>8/23/2026</a:t>
+              <a:t>8/25/2026</a:t>
             </a:fld>
             <a:endParaRPr lang="en-US" dirty="0"/>
           </a:p>
@@ -3762,7 +3760,7 @@
             <a:fld id="{B61BEF0D-F0BB-DE4B-95CE-6DB70DBA9567}" type="datetimeFigureOut">
               <a:rPr lang="en-US" dirty="0"/>
               <a:pPr/>
-              <a:t>8/23/2026</a:t>
+              <a:t>8/25/2026</a:t>
             </a:fld>
             <a:endParaRPr lang="en-US" dirty="0"/>
           </a:p>
@@ -3854,7 +3852,7 @@
             <a:fld id="{B61BEF0D-F0BB-DE4B-95CE-6DB70DBA9567}" type="datetimeFigureOut">
               <a:rPr lang="en-US" dirty="0"/>
               <a:pPr/>
-              <a:t>8/23/2026</a:t>
+              <a:t>8/25/2026</a:t>
             </a:fld>
             <a:endParaRPr lang="en-US" dirty="0"/>
           </a:p>
@@ -4106,7 +4104,7 @@
             <a:fld id="{B61BEF0D-F0BB-DE4B-95CE-6DB70DBA9567}" type="datetimeFigureOut">
               <a:rPr lang="en-US" dirty="0"/>
               <a:pPr/>
-              <a:t>8/23/2026</a:t>
+              <a:t>8/25/2026</a:t>
             </a:fld>
             <a:endParaRPr lang="en-US" dirty="0"/>
           </a:p>
@@ -4386,7 +4384,7 @@
             <a:fld id="{B61BEF0D-F0BB-DE4B-95CE-6DB70DBA9567}" type="datetimeFigureOut">
               <a:rPr lang="en-US" dirty="0"/>
               <a:pPr/>
-              <a:t>8/23/2026</a:t>
+              <a:t>8/25/2026</a:t>
             </a:fld>
             <a:endParaRPr lang="en-US" dirty="0"/>
           </a:p>
@@ -4797,7 +4795,7 @@
             <a:fld id="{B61BEF0D-F0BB-DE4B-95CE-6DB70DBA9567}" type="datetimeFigureOut">
               <a:rPr lang="en-US" dirty="0"/>
               <a:pPr/>
-              <a:t>8/23/2026</a:t>
+              <a:t>8/25/2026</a:t>
             </a:fld>
             <a:endParaRPr lang="en-US" dirty="0"/>
           </a:p>
@@ -6689,514 +6687,6 @@
 </p:sld>
 </file>
 
-<file path=ppt/slides/slide6.xml><?xml version="1.0" encoding="utf-8"?>
-<p:sld xmlns:a="http://schemas.openxmlformats.org/drawingml/2006/main" xmlns:r="http://schemas.openxmlformats.org/officeDocument/2006/relationships" xmlns:p="http://schemas.openxmlformats.org/presentationml/2006/main">
-  <p:cSld>
-    <p:spTree>
-      <p:nvGrpSpPr>
-        <p:cNvPr id="1" name=""/>
-        <p:cNvGrpSpPr/>
-        <p:nvPr/>
-      </p:nvGrpSpPr>
-      <p:grpSpPr>
-        <a:xfrm>
-          <a:off x="0" y="0"/>
-          <a:ext cx="0" cy="0"/>
-          <a:chOff x="0" y="0"/>
-          <a:chExt cx="0" cy="0"/>
-        </a:xfrm>
-      </p:grpSpPr>
-      <p:sp>
-        <p:nvSpPr>
-          <p:cNvPr id="2" name="Título 1">
-            <a:extLst>
-              <a:ext uri="{FF2B5EF4-FFF2-40B4-BE49-F238E27FC236}">
-                <a16:creationId xmlns:a16="http://schemas.microsoft.com/office/drawing/2014/main" id="{0EE3E240-F19C-4A5F-969E-64411693E1E9}"/>
-              </a:ext>
-            </a:extLst>
-          </p:cNvPr>
-          <p:cNvSpPr>
-            <a:spLocks noGrp="1"/>
-          </p:cNvSpPr>
-          <p:nvPr>
-            <p:ph type="title"/>
-          </p:nvPr>
-        </p:nvSpPr>
-        <p:spPr/>
-        <p:txBody>
-          <a:bodyPr>
-            <a:normAutofit/>
-          </a:bodyPr>
-          <a:lstStyle/>
-          <a:p>
-            <a:r>
-              <a:rPr lang="es-ES" b="1" dirty="0">
-                <a:solidFill>
-                  <a:schemeClr val="bg2">
-                    <a:lumMod val="60000"/>
-                    <a:lumOff val="40000"/>
-                  </a:schemeClr>
-                </a:solidFill>
-                <a:latin typeface="Google Sans"/>
-              </a:rPr>
-              <a:t>Monitoreo</a:t>
-            </a:r>
-            <a:endParaRPr lang="es-MX" b="1" dirty="0">
-              <a:solidFill>
-                <a:schemeClr val="bg2">
-                  <a:lumMod val="60000"/>
-                  <a:lumOff val="40000"/>
-                </a:schemeClr>
-              </a:solidFill>
-              <a:latin typeface="Google Sans"/>
-            </a:endParaRPr>
-          </a:p>
-        </p:txBody>
-      </p:sp>
-      <p:pic>
-        <p:nvPicPr>
-          <p:cNvPr id="4" name="Picture 4" descr="TecNM | Campus Milpa Alta II">
-            <a:extLst>
-              <a:ext uri="{FF2B5EF4-FFF2-40B4-BE49-F238E27FC236}">
-                <a16:creationId xmlns:a16="http://schemas.microsoft.com/office/drawing/2014/main" id="{FA80FB92-9C07-43F4-A33B-E3A32751466E}"/>
-              </a:ext>
-            </a:extLst>
-          </p:cNvPr>
-          <p:cNvPicPr>
-            <a:picLocks noChangeAspect="1" noChangeArrowheads="1"/>
-          </p:cNvPicPr>
-          <p:nvPr/>
-        </p:nvPicPr>
-        <p:blipFill>
-          <a:blip r:embed="rId3">
-            <a:extLst>
-              <a:ext uri="{28A0092B-C50C-407E-A947-70E740481C1C}">
-                <a14:useLocalDpi xmlns:a14="http://schemas.microsoft.com/office/drawing/2010/main" val="0"/>
-              </a:ext>
-            </a:extLst>
-          </a:blip>
-          <a:srcRect/>
-          <a:stretch>
-            <a:fillRect/>
-          </a:stretch>
-        </p:blipFill>
-        <p:spPr bwMode="auto">
-          <a:xfrm>
-            <a:off x="11148053" y="5808133"/>
-            <a:ext cx="954517" cy="910166"/>
-          </a:xfrm>
-          <a:prstGeom prst="rect">
-            <a:avLst/>
-          </a:prstGeom>
-          <a:noFill/>
-          <a:extLst>
-            <a:ext uri="{909E8E84-426E-40DD-AFC4-6F175D3DCCD1}">
-              <a14:hiddenFill xmlns:a14="http://schemas.microsoft.com/office/drawing/2010/main">
-                <a:solidFill>
-                  <a:srgbClr val="FFFFFF"/>
-                </a:solidFill>
-              </a14:hiddenFill>
-            </a:ext>
-          </a:extLst>
-        </p:spPr>
-      </p:pic>
-      <p:graphicFrame>
-        <p:nvGraphicFramePr>
-          <p:cNvPr id="12" name="Objeto 11">
-            <a:extLst>
-              <a:ext uri="{FF2B5EF4-FFF2-40B4-BE49-F238E27FC236}">
-                <a16:creationId xmlns:a16="http://schemas.microsoft.com/office/drawing/2014/main" id="{6C37CE6A-6604-48DC-A69B-3C1AC7D9A3FF}"/>
-              </a:ext>
-            </a:extLst>
-          </p:cNvPr>
-          <p:cNvGraphicFramePr>
-            <a:graphicFrameLocks noChangeAspect="1"/>
-          </p:cNvGraphicFramePr>
-          <p:nvPr>
-            <p:extLst>
-              <p:ext uri="{D42A27DB-BD31-4B8C-83A1-F6EECF244321}">
-                <p14:modId xmlns:p14="http://schemas.microsoft.com/office/powerpoint/2010/main" val="309097290"/>
-              </p:ext>
-            </p:extLst>
-          </p:nvPr>
-        </p:nvGraphicFramePr>
-        <p:xfrm>
-          <a:off x="684212" y="603749"/>
-          <a:ext cx="9925517" cy="4227484"/>
-        </p:xfrm>
-        <a:graphic>
-          <a:graphicData uri="http://schemas.openxmlformats.org/presentationml/2006/ole">
-            <mc:AlternateContent xmlns:mc="http://schemas.openxmlformats.org/markup-compatibility/2006">
-              <mc:Choice xmlns:v="urn:schemas-microsoft-com:vml" Requires="v">
-                <p:oleObj spid="_x0000_s8197" name="Document" r:id="rId4" imgW="5731988" imgH="2442328" progId="Word.Document.12">
-                  <p:embed/>
-                </p:oleObj>
-              </mc:Choice>
-              <mc:Fallback>
-                <p:oleObj name="Document" r:id="rId4" imgW="5731988" imgH="2442328" progId="Word.Document.12">
-                  <p:embed/>
-                  <p:pic>
-                    <p:nvPicPr>
-                      <p:cNvPr id="0" name=""/>
-                      <p:cNvPicPr/>
-                      <p:nvPr/>
-                    </p:nvPicPr>
-                    <p:blipFill>
-                      <a:blip r:embed="rId5"/>
-                      <a:stretch>
-                        <a:fillRect/>
-                      </a:stretch>
-                    </p:blipFill>
-                    <p:spPr>
-                      <a:xfrm>
-                        <a:off x="684212" y="603749"/>
-                        <a:ext cx="9925517" cy="4227484"/>
-                      </a:xfrm>
-                      <a:prstGeom prst="rect">
-                        <a:avLst/>
-                      </a:prstGeom>
-                    </p:spPr>
-                  </p:pic>
-                </p:oleObj>
-              </mc:Fallback>
-            </mc:AlternateContent>
-          </a:graphicData>
-        </a:graphic>
-      </p:graphicFrame>
-    </p:spTree>
-    <p:extLst>
-      <p:ext uri="{BB962C8B-B14F-4D97-AF65-F5344CB8AC3E}">
-        <p14:creationId xmlns:p14="http://schemas.microsoft.com/office/powerpoint/2010/main" val="557177137"/>
-      </p:ext>
-    </p:extLst>
-  </p:cSld>
-  <p:clrMapOvr>
-    <a:masterClrMapping/>
-  </p:clrMapOvr>
-  <p:transition spd="slow">
-    <p:push dir="u"/>
-  </p:transition>
-</p:sld>
-</file>
-
-<file path=ppt/slides/slide7.xml><?xml version="1.0" encoding="utf-8"?>
-<p:sld xmlns:a="http://schemas.openxmlformats.org/drawingml/2006/main" xmlns:r="http://schemas.openxmlformats.org/officeDocument/2006/relationships" xmlns:p="http://schemas.openxmlformats.org/presentationml/2006/main">
-  <p:cSld>
-    <p:spTree>
-      <p:nvGrpSpPr>
-        <p:cNvPr id="1" name=""/>
-        <p:cNvGrpSpPr/>
-        <p:nvPr/>
-      </p:nvGrpSpPr>
-      <p:grpSpPr>
-        <a:xfrm>
-          <a:off x="0" y="0"/>
-          <a:ext cx="0" cy="0"/>
-          <a:chOff x="0" y="0"/>
-          <a:chExt cx="0" cy="0"/>
-        </a:xfrm>
-      </p:grpSpPr>
-      <p:sp>
-        <p:nvSpPr>
-          <p:cNvPr id="2" name="Título 1">
-            <a:extLst>
-              <a:ext uri="{FF2B5EF4-FFF2-40B4-BE49-F238E27FC236}">
-                <a16:creationId xmlns:a16="http://schemas.microsoft.com/office/drawing/2014/main" id="{0EE3E240-F19C-4A5F-969E-64411693E1E9}"/>
-              </a:ext>
-            </a:extLst>
-          </p:cNvPr>
-          <p:cNvSpPr>
-            <a:spLocks noGrp="1"/>
-          </p:cNvSpPr>
-          <p:nvPr>
-            <p:ph type="title"/>
-          </p:nvPr>
-        </p:nvSpPr>
-        <p:spPr/>
-        <p:txBody>
-          <a:bodyPr/>
-          <a:lstStyle/>
-          <a:p>
-            <a:r>
-              <a:rPr lang="es-MX" sz="4000" b="1" dirty="0">
-                <a:solidFill>
-                  <a:schemeClr val="bg2">
-                    <a:lumMod val="60000"/>
-                    <a:lumOff val="40000"/>
-                  </a:schemeClr>
-                </a:solidFill>
-                <a:latin typeface="Google Sans"/>
-              </a:rPr>
-              <a:t>Buenas prácticas</a:t>
-            </a:r>
-          </a:p>
-        </p:txBody>
-      </p:sp>
-      <p:sp>
-        <p:nvSpPr>
-          <p:cNvPr id="3" name="Marcador de contenido 2">
-            <a:extLst>
-              <a:ext uri="{FF2B5EF4-FFF2-40B4-BE49-F238E27FC236}">
-                <a16:creationId xmlns:a16="http://schemas.microsoft.com/office/drawing/2014/main" id="{4D103B8D-7E4E-4450-905B-D7C007245046}"/>
-              </a:ext>
-            </a:extLst>
-          </p:cNvPr>
-          <p:cNvSpPr>
-            <a:spLocks noGrp="1"/>
-          </p:cNvSpPr>
-          <p:nvPr>
-            <p:ph idx="1"/>
-          </p:nvPr>
-        </p:nvSpPr>
-        <p:spPr>
-          <a:xfrm>
-            <a:off x="684212" y="1100667"/>
-            <a:ext cx="10584424" cy="3386666"/>
-          </a:xfrm>
-        </p:spPr>
-        <p:txBody>
-          <a:bodyPr>
-            <a:normAutofit fontScale="62500" lnSpcReduction="20000"/>
-          </a:bodyPr>
-          <a:lstStyle/>
-          <a:p>
-            <a:pPr algn="just"/>
-            <a:r>
-              <a:rPr lang="es-ES" sz="3200" dirty="0">
-                <a:solidFill>
-                  <a:schemeClr val="tx1"/>
-                </a:solidFill>
-                <a:latin typeface="Google Sans"/>
-              </a:rPr>
-              <a:t>Evitar ejecutar procesos como </a:t>
-            </a:r>
-            <a:r>
-              <a:rPr lang="es-ES" sz="3200" dirty="0" err="1">
-                <a:solidFill>
-                  <a:schemeClr val="tx1"/>
-                </a:solidFill>
-                <a:latin typeface="Google Sans"/>
-              </a:rPr>
-              <a:t>root</a:t>
-            </a:r>
-            <a:r>
-              <a:rPr lang="es-ES" sz="3200" dirty="0">
-                <a:solidFill>
-                  <a:schemeClr val="tx1"/>
-                </a:solidFill>
-                <a:latin typeface="Google Sans"/>
-              </a:rPr>
-              <a:t> dentro del contenedor: definir un usuario no privilegiado con la instrucción USER en el </a:t>
-            </a:r>
-            <a:r>
-              <a:rPr lang="es-ES" sz="3200" dirty="0" err="1">
-                <a:solidFill>
-                  <a:schemeClr val="tx1"/>
-                </a:solidFill>
-                <a:latin typeface="Google Sans"/>
-              </a:rPr>
-              <a:t>Dockerfile</a:t>
-            </a:r>
-            <a:r>
-              <a:rPr lang="es-ES" sz="3200" dirty="0">
-                <a:solidFill>
-                  <a:schemeClr val="tx1"/>
-                </a:solidFill>
-                <a:latin typeface="Google Sans"/>
-              </a:rPr>
-              <a:t>.</a:t>
-            </a:r>
-          </a:p>
-          <a:p>
-            <a:pPr algn="just"/>
-            <a:r>
-              <a:rPr lang="es-ES" sz="3200" dirty="0">
-                <a:solidFill>
-                  <a:schemeClr val="tx1"/>
-                </a:solidFill>
-                <a:latin typeface="Google Sans"/>
-              </a:rPr>
-              <a:t>No incluir contraseñas ni secretos directamente en la imagen (ni en el </a:t>
-            </a:r>
-            <a:r>
-              <a:rPr lang="es-ES" sz="3200" dirty="0" err="1">
-                <a:solidFill>
-                  <a:schemeClr val="tx1"/>
-                </a:solidFill>
-                <a:latin typeface="Google Sans"/>
-              </a:rPr>
-              <a:t>Dockerfile</a:t>
-            </a:r>
-            <a:r>
-              <a:rPr lang="es-ES" sz="3200" dirty="0">
-                <a:solidFill>
-                  <a:schemeClr val="tx1"/>
-                </a:solidFill>
-                <a:latin typeface="Google Sans"/>
-              </a:rPr>
-              <a:t>, ni copiados como archivo): usar variables de entorno inyectadas en tiempo de ejecución.</a:t>
-            </a:r>
-          </a:p>
-          <a:p>
-            <a:pPr algn="just"/>
-            <a:r>
-              <a:rPr lang="es-ES" sz="3200" dirty="0">
-                <a:solidFill>
-                  <a:schemeClr val="tx1"/>
-                </a:solidFill>
-                <a:latin typeface="Google Sans"/>
-              </a:rPr>
-              <a:t>Usar archivos .</a:t>
-            </a:r>
-            <a:r>
-              <a:rPr lang="es-ES" sz="3200" dirty="0" err="1">
-                <a:solidFill>
-                  <a:schemeClr val="tx1"/>
-                </a:solidFill>
-                <a:latin typeface="Google Sans"/>
-              </a:rPr>
-              <a:t>env</a:t>
-            </a:r>
-            <a:r>
-              <a:rPr lang="es-ES" sz="3200" dirty="0">
-                <a:solidFill>
-                  <a:schemeClr val="tx1"/>
-                </a:solidFill>
-                <a:latin typeface="Google Sans"/>
-              </a:rPr>
-              <a:t> para separar configuración del código, y nunca versionarlos con datos reales.</a:t>
-            </a:r>
-          </a:p>
-          <a:p>
-            <a:pPr algn="just"/>
-            <a:r>
-              <a:rPr lang="es-ES" sz="3200" dirty="0">
-                <a:solidFill>
-                  <a:schemeClr val="tx1"/>
-                </a:solidFill>
-                <a:latin typeface="Google Sans"/>
-              </a:rPr>
-              <a:t>Versionar las imágenes con tags explícitos, evitando depender de </a:t>
-            </a:r>
-            <a:r>
-              <a:rPr lang="es-ES" sz="3200" dirty="0" err="1">
-                <a:solidFill>
-                  <a:schemeClr val="tx1"/>
-                </a:solidFill>
-                <a:latin typeface="Google Sans"/>
-              </a:rPr>
-              <a:t>latest</a:t>
-            </a:r>
-            <a:r>
-              <a:rPr lang="es-ES" sz="3200" dirty="0">
-                <a:solidFill>
-                  <a:schemeClr val="tx1"/>
-                </a:solidFill>
-                <a:latin typeface="Google Sans"/>
-              </a:rPr>
-              <a:t> en producción.</a:t>
-            </a:r>
-          </a:p>
-          <a:p>
-            <a:pPr algn="just"/>
-            <a:r>
-              <a:rPr lang="es-ES" sz="3200" dirty="0">
-                <a:solidFill>
-                  <a:schemeClr val="tx1"/>
-                </a:solidFill>
-                <a:latin typeface="Google Sans"/>
-              </a:rPr>
-              <a:t>Mantener las imágenes pequeñas: menos superficie de ataque, descargas más rápidas, despliegues más ágiles.</a:t>
-            </a:r>
-          </a:p>
-          <a:p>
-            <a:pPr algn="just"/>
-            <a:r>
-              <a:rPr lang="es-ES" sz="3200" dirty="0">
-                <a:solidFill>
-                  <a:schemeClr val="tx1"/>
-                </a:solidFill>
-                <a:latin typeface="Google Sans"/>
-              </a:rPr>
-              <a:t>Limpiar recursos no utilizados periódicamente para liberar espacio en disco.</a:t>
-            </a:r>
-          </a:p>
-          <a:p>
-            <a:pPr marL="0" indent="0" algn="just">
-              <a:buNone/>
-            </a:pPr>
-            <a:endParaRPr lang="es-MX" sz="3200" dirty="0">
-              <a:solidFill>
-                <a:schemeClr val="tx1"/>
-              </a:solidFill>
-              <a:latin typeface="Google Sans"/>
-            </a:endParaRPr>
-          </a:p>
-        </p:txBody>
-      </p:sp>
-      <p:pic>
-        <p:nvPicPr>
-          <p:cNvPr id="4" name="Picture 4" descr="TecNM | Campus Milpa Alta II">
-            <a:extLst>
-              <a:ext uri="{FF2B5EF4-FFF2-40B4-BE49-F238E27FC236}">
-                <a16:creationId xmlns:a16="http://schemas.microsoft.com/office/drawing/2014/main" id="{A65AC895-D0F5-4B3E-BD9E-8A03D2A92655}"/>
-              </a:ext>
-            </a:extLst>
-          </p:cNvPr>
-          <p:cNvPicPr>
-            <a:picLocks noChangeAspect="1" noChangeArrowheads="1"/>
-          </p:cNvPicPr>
-          <p:nvPr/>
-        </p:nvPicPr>
-        <p:blipFill>
-          <a:blip r:embed="rId2">
-            <a:extLst>
-              <a:ext uri="{28A0092B-C50C-407E-A947-70E740481C1C}">
-                <a14:useLocalDpi xmlns:a14="http://schemas.microsoft.com/office/drawing/2010/main" val="0"/>
-              </a:ext>
-            </a:extLst>
-          </a:blip>
-          <a:srcRect/>
-          <a:stretch>
-            <a:fillRect/>
-          </a:stretch>
-        </p:blipFill>
-        <p:spPr bwMode="auto">
-          <a:xfrm>
-            <a:off x="11148053" y="5808133"/>
-            <a:ext cx="954517" cy="910166"/>
-          </a:xfrm>
-          <a:prstGeom prst="rect">
-            <a:avLst/>
-          </a:prstGeom>
-          <a:noFill/>
-          <a:extLst>
-            <a:ext uri="{909E8E84-426E-40DD-AFC4-6F175D3DCCD1}">
-              <a14:hiddenFill xmlns:a14="http://schemas.microsoft.com/office/drawing/2010/main">
-                <a:solidFill>
-                  <a:srgbClr val="FFFFFF"/>
-                </a:solidFill>
-              </a14:hiddenFill>
-            </a:ext>
-          </a:extLst>
-        </p:spPr>
-      </p:pic>
-    </p:spTree>
-    <p:extLst>
-      <p:ext uri="{BB962C8B-B14F-4D97-AF65-F5344CB8AC3E}">
-        <p14:creationId xmlns:p14="http://schemas.microsoft.com/office/powerpoint/2010/main" val="3954564442"/>
-      </p:ext>
-    </p:extLst>
-  </p:cSld>
-  <p:clrMapOvr>
-    <a:masterClrMapping/>
-  </p:clrMapOvr>
-  <p:transition spd="slow">
-    <p:push dir="u"/>
-  </p:transition>
-</p:sld>
-</file>
-
 <file path=ppt/theme/theme1.xml><?xml version="1.0" encoding="utf-8"?>
 <a:theme xmlns:a="http://schemas.openxmlformats.org/drawingml/2006/main" name="Sector">
   <a:themeElements>
